--- a/output/3_2.pptx
+++ b/output/3_2.pptx
@@ -3174,8 +3174,8 @@
         </p:nvCxnSpPr>
         <p:spPr>
           <a:xfrm flipV="1">
-            <a:off x="4572000.0" y="2343150.0"/>
-            <a:ext cx="45720.0" cy="45720.0"/>
+            <a:off x="4572000.0" y="2328062.4"/>
+            <a:ext cx="32461.200000000186" cy="243687.6000000001"/>
           </a:xfrm>
           <a:prstGeom prst="line">
             <a:avLst/>
@@ -3209,8 +3209,8 @@
         </p:nvCxnSpPr>
         <p:spPr>
           <a:xfrm flipV="1">
-            <a:off x="4617720.0" y="2251710.0"/>
-            <a:ext cx="45720.0" cy="91440.0"/>
+            <a:off x="4604461.2" y="2226106.8"/>
+            <a:ext cx="32918.39999999944" cy="101955.6000000001"/>
           </a:xfrm>
           <a:prstGeom prst="line">
             <a:avLst/>
@@ -3244,8 +3244,8 @@
         </p:nvCxnSpPr>
         <p:spPr>
           <a:xfrm flipV="1">
-            <a:off x="4663440.0" y="2160270.0"/>
-            <a:ext cx="45720.0" cy="91440.0"/>
+            <a:off x="4637379.6" y="2163013.2"/>
+            <a:ext cx="32461.200000000186" cy="63093.59999999963"/>
           </a:xfrm>
           <a:prstGeom prst="line">
             <a:avLst/>
@@ -3279,8 +3279,8 @@
         </p:nvCxnSpPr>
         <p:spPr>
           <a:xfrm flipV="1">
-            <a:off x="4709160.0" y="2068830.0"/>
-            <a:ext cx="45720.0" cy="91440.0"/>
+            <a:off x="4669840.8" y="2114550.0"/>
+            <a:ext cx="32918.40000000037" cy="48463.200000000186"/>
           </a:xfrm>
           <a:prstGeom prst="line">
             <a:avLst/>
@@ -3314,8 +3314,8 @@
         </p:nvCxnSpPr>
         <p:spPr>
           <a:xfrm flipV="1">
-            <a:off x="4754880.0" y="2000250.0"/>
-            <a:ext cx="45720.0" cy="68580.0"/>
+            <a:off x="4702759.2" y="2072944.8"/>
+            <a:ext cx="32461.200000000186" cy="41605.19999999995"/>
           </a:xfrm>
           <a:prstGeom prst="line">
             <a:avLst/>
@@ -3349,8 +3349,8 @@
         </p:nvCxnSpPr>
         <p:spPr>
           <a:xfrm flipV="1">
-            <a:off x="4800600.0" y="1931670.0"/>
-            <a:ext cx="45720.0" cy="68580.0"/>
+            <a:off x="4735220.4" y="2036826.0"/>
+            <a:ext cx="32918.39999999944" cy="36118.80000000005"/>
           </a:xfrm>
           <a:prstGeom prst="line">
             <a:avLst/>
@@ -3384,8 +3384,8 @@
         </p:nvCxnSpPr>
         <p:spPr>
           <a:xfrm flipV="1">
-            <a:off x="4846320.0" y="1885950.0"/>
-            <a:ext cx="45720.0" cy="45720.0"/>
+            <a:off x="4768138.8" y="2003450.4"/>
+            <a:ext cx="32461.200000000186" cy="33375.60000000009"/>
           </a:xfrm>
           <a:prstGeom prst="line">
             <a:avLst/>
@@ -3419,8 +3419,8 @@
         </p:nvCxnSpPr>
         <p:spPr>
           <a:xfrm flipV="1">
-            <a:off x="4892040.0" y="1853946.0"/>
-            <a:ext cx="45720.0" cy="32004.0"/>
+            <a:off x="4800600.0" y="1972360.8"/>
+            <a:ext cx="32461.200000000186" cy="31089.59999999986"/>
           </a:xfrm>
           <a:prstGeom prst="line">
             <a:avLst/>
@@ -3454,8 +3454,8 @@
         </p:nvCxnSpPr>
         <p:spPr>
           <a:xfrm flipV="1">
-            <a:off x="4937760.0" y="1840230.0"/>
-            <a:ext cx="45720.0" cy="13716.0"/>
+            <a:off x="4833061.2" y="1944014.4"/>
+            <a:ext cx="32918.39999999944" cy="28346.40000000014"/>
           </a:xfrm>
           <a:prstGeom prst="line">
             <a:avLst/>
@@ -3489,8 +3489,8 @@
         </p:nvCxnSpPr>
         <p:spPr>
           <a:xfrm flipV="1">
-            <a:off x="4983480.0" y="1835658.0"/>
-            <a:ext cx="22860.0" cy="4572.0"/>
+            <a:off x="4865979.6" y="1916582.4"/>
+            <a:ext cx="32461.200000000186" cy="27432.0"/>
           </a:xfrm>
           <a:prstGeom prst="line">
             <a:avLst/>
@@ -3524,8 +3524,8 @@
         </p:nvCxnSpPr>
         <p:spPr>
           <a:xfrm flipV="1">
-            <a:off x="5006340.0" y="1833372.0"/>
-            <a:ext cx="18288.0" cy="2286.0"/>
+            <a:off x="4898440.8" y="1891436.4"/>
+            <a:ext cx="32918.40000000037" cy="25146.0"/>
           </a:xfrm>
           <a:prstGeom prst="line">
             <a:avLst/>
@@ -3559,8 +3559,8 @@
         </p:nvCxnSpPr>
         <p:spPr>
           <a:xfrm flipV="1">
-            <a:off x="5033772.0" y="2000250.0"/>
-            <a:ext cx="18288.0" cy="18288.0"/>
+            <a:off x="4931359.2" y="1867662.0"/>
+            <a:ext cx="32461.200000000186" cy="23774.399999999907"/>
           </a:xfrm>
           <a:prstGeom prst="line">
             <a:avLst/>
@@ -3594,8 +3594,8 @@
         </p:nvCxnSpPr>
         <p:spPr>
           <a:xfrm flipV="1">
-            <a:off x="5052060.0" y="1977390.0"/>
-            <a:ext cx="22860.0" cy="22860.0"/>
+            <a:off x="4963820.4" y="1844344.8"/>
+            <a:ext cx="32918.39999999944" cy="23317.199999999953"/>
           </a:xfrm>
           <a:prstGeom prst="line">
             <a:avLst/>
@@ -3629,8 +3629,8 @@
         </p:nvCxnSpPr>
         <p:spPr>
           <a:xfrm flipV="1">
-            <a:off x="5074920.0" y="1931670.0"/>
-            <a:ext cx="45720.0" cy="45720.0"/>
+            <a:off x="4996738.8" y="1657350.0"/>
+            <a:ext cx="32461.200000000186" cy="186994.80000000005"/>
           </a:xfrm>
           <a:prstGeom prst="line">
             <a:avLst/>
@@ -3664,8 +3664,8 @@
         </p:nvCxnSpPr>
         <p:spPr>
           <a:xfrm flipV="1">
-            <a:off x="5120640.0" y="1885950.0"/>
-            <a:ext cx="45720.0" cy="45720.0"/>
+            <a:off x="5029200.0" y="1876348.8"/>
+            <a:ext cx="16459.200000000186" cy="9601.199999999953"/>
           </a:xfrm>
           <a:prstGeom prst="line">
             <a:avLst/>
@@ -3699,8 +3699,8 @@
         </p:nvCxnSpPr>
         <p:spPr>
           <a:xfrm flipV="1">
-            <a:off x="5166360.0" y="1840230.0"/>
-            <a:ext cx="45720.0" cy="45720.0"/>
+            <a:off x="5045659.2" y="1866290.4"/>
+            <a:ext cx="16002.0" cy="10058.40000000014"/>
           </a:xfrm>
           <a:prstGeom prst="line">
             <a:avLst/>
@@ -3734,8 +3734,8 @@
         </p:nvCxnSpPr>
         <p:spPr>
           <a:xfrm flipV="1">
-            <a:off x="5212080.0" y="1794510.0"/>
-            <a:ext cx="45720.0" cy="45720.0"/>
+            <a:off x="5061661.2" y="1856689.2"/>
+            <a:ext cx="16459.200000000186" cy="9601.199999999953"/>
           </a:xfrm>
           <a:prstGeom prst="line">
             <a:avLst/>
@@ -3761,15 +3761,400 @@
           </a:fontRef>
         </p:style>
       </p:cxnSp>
-      <p:sp>
-        <p:nvSpPr>
-          <p:cNvPr id="21" name="Oval 20"/>
+      <p:cxnSp>
+        <p:nvCxnSpPr>
+          <p:cNvPr id="21" name="Connector 20"/>
+          <p:cNvCxnSpPr/>
+          <p:nvPr/>
+        </p:nvCxnSpPr>
+        <p:spPr>
+          <a:xfrm flipV="1">
+            <a:off x="5078120.4" y="1846630.7999999998"/>
+            <a:ext cx="16459.199999999255" cy="10058.40000000014"/>
+          </a:xfrm>
+          <a:prstGeom prst="line">
+            <a:avLst/>
+          </a:prstGeom>
+          <a:ln w="25400">
+            <a:solidFill>
+              <a:srgbClr val="00C8FF"/>
+            </a:solidFill>
+          </a:ln>
+        </p:spPr>
+        <p:style>
+          <a:lnRef idx="2">
+            <a:schemeClr val="accent1"/>
+          </a:lnRef>
+          <a:fillRef idx="0">
+            <a:schemeClr val="accent1"/>
+          </a:fillRef>
+          <a:effectRef idx="1">
+            <a:schemeClr val="accent1"/>
+          </a:effectRef>
+          <a:fontRef idx="minor">
+            <a:schemeClr val="tx1"/>
+          </a:fontRef>
+        </p:style>
+      </p:cxnSp>
+      <p:cxnSp>
+        <p:nvCxnSpPr>
+          <p:cNvPr id="22" name="Connector 21"/>
+          <p:cNvCxnSpPr/>
+          <p:nvPr/>
+        </p:nvCxnSpPr>
+        <p:spPr>
+          <a:xfrm flipV="1">
+            <a:off x="5094579.6" y="1837029.6"/>
+            <a:ext cx="16459.200000000186" cy="9601.19999999972"/>
+          </a:xfrm>
+          <a:prstGeom prst="line">
+            <a:avLst/>
+          </a:prstGeom>
+          <a:ln w="25400">
+            <a:solidFill>
+              <a:srgbClr val="00C8FF"/>
+            </a:solidFill>
+          </a:ln>
+        </p:spPr>
+        <p:style>
+          <a:lnRef idx="2">
+            <a:schemeClr val="accent1"/>
+          </a:lnRef>
+          <a:fillRef idx="0">
+            <a:schemeClr val="accent1"/>
+          </a:fillRef>
+          <a:effectRef idx="1">
+            <a:schemeClr val="accent1"/>
+          </a:effectRef>
+          <a:fontRef idx="minor">
+            <a:schemeClr val="tx1"/>
+          </a:fontRef>
+        </p:style>
+      </p:cxnSp>
+      <p:cxnSp>
+        <p:nvCxnSpPr>
+          <p:cNvPr id="23" name="Connector 22"/>
+          <p:cNvCxnSpPr/>
+          <p:nvPr/>
+        </p:nvCxnSpPr>
+        <p:spPr>
+          <a:xfrm flipV="1">
+            <a:off x="5111038.8" y="1826971.2"/>
+            <a:ext cx="16002.0" cy="10058.40000000014"/>
+          </a:xfrm>
+          <a:prstGeom prst="line">
+            <a:avLst/>
+          </a:prstGeom>
+          <a:ln w="25400">
+            <a:solidFill>
+              <a:srgbClr val="00C8FF"/>
+            </a:solidFill>
+          </a:ln>
+        </p:spPr>
+        <p:style>
+          <a:lnRef idx="2">
+            <a:schemeClr val="accent1"/>
+          </a:lnRef>
+          <a:fillRef idx="0">
+            <a:schemeClr val="accent1"/>
+          </a:fillRef>
+          <a:effectRef idx="1">
+            <a:schemeClr val="accent1"/>
+          </a:effectRef>
+          <a:fontRef idx="minor">
+            <a:schemeClr val="tx1"/>
+          </a:fontRef>
+        </p:style>
+      </p:cxnSp>
+      <p:cxnSp>
+        <p:nvCxnSpPr>
+          <p:cNvPr id="24" name="Connector 23"/>
+          <p:cNvCxnSpPr/>
+          <p:nvPr/>
+        </p:nvCxnSpPr>
+        <p:spPr>
+          <a:xfrm flipV="1">
+            <a:off x="5127040.8" y="1817370.0"/>
+            <a:ext cx="16459.200000000186" cy="9601.199999999953"/>
+          </a:xfrm>
+          <a:prstGeom prst="line">
+            <a:avLst/>
+          </a:prstGeom>
+          <a:ln w="25400">
+            <a:solidFill>
+              <a:srgbClr val="00C8FF"/>
+            </a:solidFill>
+          </a:ln>
+        </p:spPr>
+        <p:style>
+          <a:lnRef idx="2">
+            <a:schemeClr val="accent1"/>
+          </a:lnRef>
+          <a:fillRef idx="0">
+            <a:schemeClr val="accent1"/>
+          </a:fillRef>
+          <a:effectRef idx="1">
+            <a:schemeClr val="accent1"/>
+          </a:effectRef>
+          <a:fontRef idx="minor">
+            <a:schemeClr val="tx1"/>
+          </a:fontRef>
+        </p:style>
+      </p:cxnSp>
+      <p:cxnSp>
+        <p:nvCxnSpPr>
+          <p:cNvPr id="25" name="Connector 24"/>
+          <p:cNvCxnSpPr/>
+          <p:nvPr/>
+        </p:nvCxnSpPr>
+        <p:spPr>
+          <a:xfrm flipV="1">
+            <a:off x="5143500.0" y="1807768.7999999998"/>
+            <a:ext cx="16459.200000000186" cy="9601.200000000186"/>
+          </a:xfrm>
+          <a:prstGeom prst="line">
+            <a:avLst/>
+          </a:prstGeom>
+          <a:ln w="25400">
+            <a:solidFill>
+              <a:srgbClr val="00C8FF"/>
+            </a:solidFill>
+          </a:ln>
+        </p:spPr>
+        <p:style>
+          <a:lnRef idx="2">
+            <a:schemeClr val="accent1"/>
+          </a:lnRef>
+          <a:fillRef idx="0">
+            <a:schemeClr val="accent1"/>
+          </a:fillRef>
+          <a:effectRef idx="1">
+            <a:schemeClr val="accent1"/>
+          </a:effectRef>
+          <a:fontRef idx="minor">
+            <a:schemeClr val="tx1"/>
+          </a:fontRef>
+        </p:style>
+      </p:cxnSp>
+      <p:cxnSp>
+        <p:nvCxnSpPr>
+          <p:cNvPr id="26" name="Connector 25"/>
+          <p:cNvCxnSpPr/>
+          <p:nvPr/>
+        </p:nvCxnSpPr>
+        <p:spPr>
+          <a:xfrm flipV="1">
+            <a:off x="5159959.2" y="1797710.4"/>
+            <a:ext cx="16002.0" cy="10058.399999999907"/>
+          </a:xfrm>
+          <a:prstGeom prst="line">
+            <a:avLst/>
+          </a:prstGeom>
+          <a:ln w="25400">
+            <a:solidFill>
+              <a:srgbClr val="00C8FF"/>
+            </a:solidFill>
+          </a:ln>
+        </p:spPr>
+        <p:style>
+          <a:lnRef idx="2">
+            <a:schemeClr val="accent1"/>
+          </a:lnRef>
+          <a:fillRef idx="0">
+            <a:schemeClr val="accent1"/>
+          </a:fillRef>
+          <a:effectRef idx="1">
+            <a:schemeClr val="accent1"/>
+          </a:effectRef>
+          <a:fontRef idx="minor">
+            <a:schemeClr val="tx1"/>
+          </a:fontRef>
+        </p:style>
+      </p:cxnSp>
+      <p:cxnSp>
+        <p:nvCxnSpPr>
+          <p:cNvPr id="27" name="Connector 26"/>
+          <p:cNvCxnSpPr/>
+          <p:nvPr/>
+        </p:nvCxnSpPr>
+        <p:spPr>
+          <a:xfrm flipV="1">
+            <a:off x="5175961.2" y="1788109.2000000002"/>
+            <a:ext cx="16459.200000000186" cy="9601.19999999972"/>
+          </a:xfrm>
+          <a:prstGeom prst="line">
+            <a:avLst/>
+          </a:prstGeom>
+          <a:ln w="25400">
+            <a:solidFill>
+              <a:srgbClr val="00C8FF"/>
+            </a:solidFill>
+          </a:ln>
+        </p:spPr>
+        <p:style>
+          <a:lnRef idx="2">
+            <a:schemeClr val="accent1"/>
+          </a:lnRef>
+          <a:fillRef idx="0">
+            <a:schemeClr val="accent1"/>
+          </a:fillRef>
+          <a:effectRef idx="1">
+            <a:schemeClr val="accent1"/>
+          </a:effectRef>
+          <a:fontRef idx="minor">
+            <a:schemeClr val="tx1"/>
+          </a:fontRef>
+        </p:style>
+      </p:cxnSp>
+      <p:cxnSp>
+        <p:nvCxnSpPr>
+          <p:cNvPr id="28" name="Connector 27"/>
+          <p:cNvCxnSpPr/>
+          <p:nvPr/>
+        </p:nvCxnSpPr>
+        <p:spPr>
+          <a:xfrm flipV="1">
+            <a:off x="5192420.4" y="1778050.8"/>
+            <a:ext cx="16459.199999999255" cy="10058.40000000014"/>
+          </a:xfrm>
+          <a:prstGeom prst="line">
+            <a:avLst/>
+          </a:prstGeom>
+          <a:ln w="25400">
+            <a:solidFill>
+              <a:srgbClr val="00C8FF"/>
+            </a:solidFill>
+          </a:ln>
+        </p:spPr>
+        <p:style>
+          <a:lnRef idx="2">
+            <a:schemeClr val="accent1"/>
+          </a:lnRef>
+          <a:fillRef idx="0">
+            <a:schemeClr val="accent1"/>
+          </a:fillRef>
+          <a:effectRef idx="1">
+            <a:schemeClr val="accent1"/>
+          </a:effectRef>
+          <a:fontRef idx="minor">
+            <a:schemeClr val="tx1"/>
+          </a:fontRef>
+        </p:style>
+      </p:cxnSp>
+      <p:cxnSp>
+        <p:nvCxnSpPr>
+          <p:cNvPr id="29" name="Connector 28"/>
+          <p:cNvCxnSpPr/>
+          <p:nvPr/>
+        </p:nvCxnSpPr>
+        <p:spPr>
+          <a:xfrm flipV="1">
+            <a:off x="5208879.6" y="1768449.6"/>
+            <a:ext cx="16459.200000000186" cy="9601.199999999953"/>
+          </a:xfrm>
+          <a:prstGeom prst="line">
+            <a:avLst/>
+          </a:prstGeom>
+          <a:ln w="25400">
+            <a:solidFill>
+              <a:srgbClr val="00C8FF"/>
+            </a:solidFill>
+          </a:ln>
+        </p:spPr>
+        <p:style>
+          <a:lnRef idx="2">
+            <a:schemeClr val="accent1"/>
+          </a:lnRef>
+          <a:fillRef idx="0">
+            <a:schemeClr val="accent1"/>
+          </a:fillRef>
+          <a:effectRef idx="1">
+            <a:schemeClr val="accent1"/>
+          </a:effectRef>
+          <a:fontRef idx="minor">
+            <a:schemeClr val="tx1"/>
+          </a:fontRef>
+        </p:style>
+      </p:cxnSp>
+      <p:cxnSp>
+        <p:nvCxnSpPr>
+          <p:cNvPr id="30" name="Connector 29"/>
+          <p:cNvCxnSpPr/>
+          <p:nvPr/>
+        </p:nvCxnSpPr>
+        <p:spPr>
+          <a:xfrm flipV="1">
+            <a:off x="5225338.8" y="1758391.2000000002"/>
+            <a:ext cx="16002.0" cy="10058.399999999907"/>
+          </a:xfrm>
+          <a:prstGeom prst="line">
+            <a:avLst/>
+          </a:prstGeom>
+          <a:ln w="25400">
+            <a:solidFill>
+              <a:srgbClr val="00C8FF"/>
+            </a:solidFill>
+          </a:ln>
+        </p:spPr>
+        <p:style>
+          <a:lnRef idx="2">
+            <a:schemeClr val="accent1"/>
+          </a:lnRef>
+          <a:fillRef idx="0">
+            <a:schemeClr val="accent1"/>
+          </a:fillRef>
+          <a:effectRef idx="1">
+            <a:schemeClr val="accent1"/>
+          </a:effectRef>
+          <a:fontRef idx="minor">
+            <a:schemeClr val="tx1"/>
+          </a:fontRef>
+        </p:style>
+      </p:cxnSp>
+      <p:cxnSp>
+        <p:nvCxnSpPr>
+          <p:cNvPr id="31" name="Connector 30"/>
+          <p:cNvCxnSpPr/>
+          <p:nvPr/>
+        </p:nvCxnSpPr>
+        <p:spPr>
+          <a:xfrm flipV="1">
+            <a:off x="5241340.8" y="1748790.0"/>
+            <a:ext cx="16459.200000000186" cy="9601.200000000186"/>
+          </a:xfrm>
+          <a:prstGeom prst="line">
+            <a:avLst/>
+          </a:prstGeom>
+          <a:ln w="25400">
+            <a:solidFill>
+              <a:srgbClr val="00C8FF"/>
+            </a:solidFill>
+          </a:ln>
+        </p:spPr>
+        <p:style>
+          <a:lnRef idx="2">
+            <a:schemeClr val="accent1"/>
+          </a:lnRef>
+          <a:fillRef idx="0">
+            <a:schemeClr val="accent1"/>
+          </a:fillRef>
+          <a:effectRef idx="1">
+            <a:schemeClr val="accent1"/>
+          </a:effectRef>
+          <a:fontRef idx="minor">
+            <a:schemeClr val="tx1"/>
+          </a:fontRef>
+        </p:style>
+      </p:cxnSp>
+      <p:sp>
+        <p:nvSpPr>
+          <p:cNvPr id="32" name="Oval 31"/>
           <p:cNvSpPr/>
           <p:nvPr/>
         </p:nvSpPr>
         <p:spPr>
           <a:xfrm>
-            <a:off x="4991100" y="1795272"/>
+            <a:off x="4991100" y="1619250"/>
             <a:ext cx="76200" cy="76200"/>
           </a:xfrm>
           <a:prstGeom prst="ellipse">
@@ -3806,56 +4191,13 @@
       </p:sp>
       <p:sp>
         <p:nvSpPr>
-          <p:cNvPr id="22" name="Oval 21"/>
+          <p:cNvPr id="33" name="Oval 32"/>
           <p:cNvSpPr/>
           <p:nvPr/>
         </p:nvSpPr>
         <p:spPr>
           <a:xfrm>
-            <a:off x="4991100" y="1985010"/>
-            <a:ext cx="76200" cy="76200"/>
-          </a:xfrm>
-          <a:prstGeom prst="ellipse">
-            <a:avLst/>
-          </a:prstGeom>
-          <a:noFill/>
-          <a:ln>
-            <a:solidFill>
-              <a:srgbClr val="FFFFFF"/>
-            </a:solidFill>
-          </a:ln>
-        </p:spPr>
-        <p:style>
-          <a:lnRef idx="1">
-            <a:schemeClr val="accent1"/>
-          </a:lnRef>
-          <a:fillRef idx="3">
-            <a:schemeClr val="accent1"/>
-          </a:fillRef>
-          <a:effectRef idx="2">
-            <a:schemeClr val="accent1"/>
-          </a:effectRef>
-          <a:fontRef idx="minor">
-            <a:schemeClr val="lt1"/>
-          </a:fontRef>
-        </p:style>
-        <p:txBody>
-          <a:bodyPr rtlCol="0" anchor="ctr"/>
-          <a:lstStyle/>
-          <a:p>
-            <a:pPr algn="ctr"/>
-          </a:p>
-        </p:txBody>
-      </p:sp>
-      <p:sp>
-        <p:nvSpPr>
-          <p:cNvPr id="23" name="Oval 22"/>
-          <p:cNvSpPr/>
-          <p:nvPr/>
-        </p:nvSpPr>
-        <p:spPr>
-          <a:xfrm>
-            <a:off x="4991100" y="2122170"/>
+            <a:off x="4991100" y="1847850"/>
             <a:ext cx="76200" cy="76200"/>
           </a:xfrm>
           <a:prstGeom prst="ellipse">
@@ -3889,6 +4231,42 @@
           <a:lstStyle/>
           <a:p>
             <a:pPr algn="ctr"/>
+          </a:p>
+        </p:txBody>
+      </p:sp>
+      <p:sp>
+        <p:nvSpPr>
+          <p:cNvPr id="34" name="TextBox 33"/>
+          <p:cNvSpPr txBox="1"/>
+          <p:nvPr/>
+        </p:nvSpPr>
+        <p:spPr>
+          <a:xfrm>
+            <a:off x="5074920" y="1520190"/>
+            <a:ext cx="635000" cy="254000"/>
+          </a:xfrm>
+          <a:prstGeom prst="rect">
+            <a:avLst/>
+          </a:prstGeom>
+          <a:noFill/>
+        </p:spPr>
+        <p:txBody>
+          <a:bodyPr wrap="none">
+            <a:spAutoFit/>
+          </a:bodyPr>
+          <a:lstStyle/>
+          <a:p>
+            <a:pPr>
+              <a:defRPr sz="1200">
+                <a:solidFill>
+                  <a:srgbClr val="FFFFFF"/>
+                </a:solidFill>
+                <a:latin typeface="Inter"/>
+              </a:defRPr>
+            </a:pPr>
+            <a:r>
+              <a:t>y=f(x)</a:t>
+            </a:r>
           </a:p>
         </p:txBody>
       </p:sp>
